--- a/2026-Q4/02-PurposeOfTheGood/Week02-PurposeOfTheGood.pptx
+++ b/2026-Q4/02-PurposeOfTheGood/Week02-PurposeOfTheGood.pptx
@@ -5,7 +5,7 @@
     <p:sldMasterId id="2147483648" r:id="rId1"/>
   </p:sldMasterIdLst>
   <p:notesMasterIdLst>
-    <p:notesMasterId r:id="rId12"/>
+    <p:notesMasterId r:id="rId11"/>
   </p:notesMasterIdLst>
   <p:sldIdLst>
     <p:sldId id="256" r:id="rId2"/>
@@ -17,7 +17,6 @@
     <p:sldId id="260" r:id="rId8"/>
     <p:sldId id="261" r:id="rId9"/>
     <p:sldId id="263" r:id="rId10"/>
-    <p:sldId id="262" r:id="rId11"/>
   </p:sldIdLst>
   <p:sldSz cx="9144000" cy="6858000" type="screen4x3"/>
   <p:notesSz cx="6858000" cy="9144000"/>
@@ -292,7 +291,7 @@
           <a:p>
             <a:r>
               <a:rPr lang="en-US" dirty="0"/>
-              <a:t>[0:00] Welcome. Twelve weeks, one thread: God speaks, faith hears, obedience makes the invisible visible.
+              <a:t>Welcome. Twelve weeks, one thread: God speaks, faith hears, obedience makes the invisible visible.
 Say: “This course has one controlling verse, and it is on the screen. By week twelve you will know why maturity is a matter of trained perception.”
 Do not explain it yet --&gt; slide 5 does that. Advance when the room settles.</a:t>
             </a:r>
@@ -317,120 +316,6 @@
             <a:fld id="{F7021451-1387-4CA6-816F-3879F97B5CBC}" type="slidenum">
               <a:rPr lang="en-US"/>
               <a:t>1</a:t>
-            </a:fld>
-            <a:endParaRPr lang="en-US"/>
-          </a:p>
-        </p:txBody>
-      </p:sp>
-    </p:spTree>
-    <p:extLst>
-      <p:ext uri="{BB962C8B-B14F-4D97-AF65-F5344CB8AC3E}">
-        <p14:creationId xmlns:p14="http://schemas.microsoft.com/office/powerpoint/2010/main" val="1024086991"/>
-      </p:ext>
-    </p:extLst>
-  </p:cSld>
-  <p:clrMapOvr>
-    <a:masterClrMapping/>
-  </p:clrMapOvr>
-</p:notes>
-</file>
-
-<file path=ppt/notesSlides/notesSlide10.xml><?xml version="1.0" encoding="utf-8"?>
-<p:notes xmlns:a="http://schemas.openxmlformats.org/drawingml/2006/main" xmlns:r="http://schemas.openxmlformats.org/officeDocument/2006/relationships" xmlns:p="http://schemas.openxmlformats.org/presentationml/2006/main">
-  <p:cSld>
-    <p:spTree>
-      <p:nvGrpSpPr>
-        <p:cNvPr id="1" name=""/>
-        <p:cNvGrpSpPr/>
-        <p:nvPr/>
-      </p:nvGrpSpPr>
-      <p:grpSpPr>
-        <a:xfrm>
-          <a:off x="0" y="0"/>
-          <a:ext cx="0" cy="0"/>
-          <a:chOff x="0" y="0"/>
-          <a:chExt cx="0" cy="0"/>
-        </a:xfrm>
-      </p:grpSpPr>
-      <p:sp>
-        <p:nvSpPr>
-          <p:cNvPr id="2" name="Slide Image Placeholder 1"/>
-          <p:cNvSpPr>
-            <a:spLocks noGrp="1" noRot="1" noChangeAspect="1"/>
-          </p:cNvSpPr>
-          <p:nvPr>
-            <p:ph type="sldImg"/>
-          </p:nvPr>
-        </p:nvSpPr>
-        <p:spPr/>
-      </p:sp>
-      <p:sp>
-        <p:nvSpPr>
-          <p:cNvPr id="3" name="Notes Placeholder 2"/>
-          <p:cNvSpPr>
-            <a:spLocks noGrp="1"/>
-          </p:cNvSpPr>
-          <p:nvPr>
-            <p:ph type="body" idx="1"/>
-          </p:nvPr>
-        </p:nvSpPr>
-        <p:spPr/>
-        <p:txBody>
-          <a:bodyPr/>
-          <a:lstStyle/>
-          <a:p>
-            <a:r>
-              <a:rPr lang="en-US" dirty="0"/>
-              <a:t>[45:00–55:00]
-Q1: let 2–3 </a:t>
-            </a:r>
-            <a:r>
-              <a:rPr lang="en-US"/>
-              <a:t>answers surface --&gt; expect </a:t>
-            </a:r>
-            <a:r>
-              <a:rPr lang="en-US" dirty="0"/>
-              <a:t>“what I like,” “what works,” “what’s moral.” Don’t correct; collect. Then observe: every answer borrowed a standard.
-Q2: push </a:t>
-            </a:r>
-            <a:r>
-              <a:rPr lang="en-US"/>
-              <a:t>toward concrete --&gt; how </a:t>
-            </a:r>
-            <a:r>
-              <a:rPr lang="en-US" dirty="0"/>
-              <a:t>would Tuesday change? If quiet, seed: “Would it change how you evaluate a sermon? A purchase? A friendship?”
-[CLICK] </a:t>
-            </a:r>
-            <a:r>
-              <a:rPr lang="en-US"/>
-              <a:t>Ground rule --&gt; set </a:t>
-            </a:r>
-            <a:r>
-              <a:rPr lang="en-US" dirty="0"/>
-              <a:t>the course culture now, week one.</a:t>
-            </a:r>
-          </a:p>
-        </p:txBody>
-      </p:sp>
-      <p:sp>
-        <p:nvSpPr>
-          <p:cNvPr id="4" name="Slide Number Placeholder 3"/>
-          <p:cNvSpPr>
-            <a:spLocks noGrp="1"/>
-          </p:cNvSpPr>
-          <p:nvPr>
-            <p:ph type="sldNum" sz="quarter" idx="10"/>
-          </p:nvPr>
-        </p:nvSpPr>
-        <p:spPr/>
-        <p:txBody>
-          <a:bodyPr/>
-          <a:lstStyle/>
-          <a:p>
-            <a:fld id="{F7021451-1387-4CA6-816F-3879F97B5CBC}" type="slidenum">
-              <a:rPr lang="en-US"/>
-              <a:t>10</a:t>
             </a:fld>
             <a:endParaRPr lang="en-US"/>
           </a:p>
@@ -495,8 +380,7 @@
           <a:p>
             <a:r>
               <a:rPr lang="en-US" dirty="0"/>
-              <a:t>[0:00–10:00]
-Open with the ordinary uses: good coffee, a good dog, a good man --&gt; ask what standard each silently borrows.
+              <a:t>Open with the ordinary uses: good coffee, a good dog, a good man --&gt; ask what standard each silently borrows.
 [CLICK] Read both verses. A man calls Jesus good as flattery.
 [CLICK] Jesus redirects: compliment → identification. He is not denying his goodness (he IS good) --&gt; he is asking whether the man knows what he just said.
 [CLICK] The participation line --&gt; land it slowly. Everything we call good borrows from Him.
@@ -587,52 +471,11 @@
           <a:p>
             <a:r>
               <a:rPr lang="en-US" dirty="0"/>
-              <a:t>[10:00–20:00]
-[CLICK] Box 1: image </a:t>
-            </a:r>
-            <a:r>
-              <a:rPr lang="en-US"/>
-              <a:t>and likeness --&gt; made </a:t>
-            </a:r>
-            <a:r>
-              <a:rPr lang="en-US" dirty="0"/>
-              <a:t>to resemble and relate.
-[CLICK] Box 2: </a:t>
-            </a:r>
-            <a:r>
-              <a:rPr lang="en-US"/>
-              <a:t>Gen 3 --&gt; the </a:t>
-            </a:r>
-            <a:r>
-              <a:rPr lang="en-US" dirty="0"/>
-              <a:t>image marred. One sentence; Week 6 returns here.
-[CLICK] Box 3: </a:t>
-            </a:r>
-            <a:r>
-              <a:rPr lang="en-US"/>
-              <a:t>Rom 8:29 --&gt; the </a:t>
-            </a:r>
-            <a:r>
-              <a:rPr lang="en-US" dirty="0"/>
-              <a:t>purpose never changed; conformity to the Son is Gen 1:26 kept.
-[CLICK] The </a:t>
-            </a:r>
-            <a:r>
-              <a:rPr lang="en-US"/>
-              <a:t>purpose stated --&gt; union</a:t>
-            </a:r>
-            <a:r>
-              <a:rPr lang="en-US" dirty="0"/>
-              <a:t>.
-[CLICK] Union, not admiration. Ask rhetorically: “Does God want your approval </a:t>
-            </a:r>
-            <a:r>
-              <a:rPr lang="en-US"/>
-              <a:t>of goodness --&gt; or </a:t>
-            </a:r>
-            <a:r>
-              <a:rPr lang="en-US" dirty="0"/>
-              <a:t>your participation in it?” Transition: “But there is a problem. How would anyone know?”</a:t>
+              <a:t>[CLICK] Box 1: image and likeness --&gt; made to resemble and relate.
+[CLICK] Box 2: Gen 3 --&gt; the image marred. One sentence; Week 6 returns here.
+[CLICK] Box 3: Rom 8:29 --&gt; the purpose never changed; conformity to the Son is Gen 1:26 kept.
+[CLICK] The purpose stated --&gt; union.
+[CLICK] Union, not admiration. Ask rhetorically: “Does God want your approval of goodness --&gt; or your participation in it?” Transition: “But there is a problem. How would anyone know?”</a:t>
             </a:r>
           </a:p>
         </p:txBody>
@@ -721,7 +564,7 @@
               <a:rPr lang="en-US" dirty="0"/>
               <a:t>[CLICK] Heb 10:5,7 — Psalm 40 in the mouth of Christ.
 [CLICK×4] Build the gold stack: form, heart, cost, obedience.
-[CLICK] Aligned once, completely, in Him — mercy first, altar second.</a:t>
+[CLICK] Aligned once, completely, in Him — mercy first, altar second, your living sacrifice</a:t>
             </a:r>
           </a:p>
           <a:p>
@@ -831,42 +674,6 @@
             </a:r>
           </a:p>
           <a:p>
-            <a:endParaRPr lang="en-US" dirty="0"/>
-          </a:p>
-          <a:p>
-            <a:endParaRPr lang="en-US" dirty="0"/>
-          </a:p>
-          <a:p>
-            <a:r>
-              <a:rPr lang="en-US" dirty="0"/>
-              <a:t>God’s Will:</a:t>
-            </a:r>
-          </a:p>
-          <a:p>
-            <a:endParaRPr lang="en-US" dirty="0"/>
-          </a:p>
-          <a:p>
-            <a:pPr marL="228600" indent="-228600">
-              <a:buAutoNum type="arabicPeriod"/>
-            </a:pPr>
-            <a:r>
-              <a:rPr lang="en-US" dirty="0"/>
-              <a:t>Sovereign Decretive Will</a:t>
-            </a:r>
-          </a:p>
-          <a:p>
-            <a:pPr marL="685800" lvl="1" indent="-228600">
-              <a:buAutoNum type="arabicPeriod"/>
-            </a:pPr>
-            <a:r>
-              <a:rPr lang="en-US" dirty="0"/>
-              <a:t>His secret will. How He brings to pass whatever He decrees.  His business alone, not yours.</a:t>
-            </a:r>
-          </a:p>
-          <a:p>
-            <a:pPr marL="685800" lvl="1" indent="-228600">
-              <a:buAutoNum type="arabicPeriod"/>
-            </a:pPr>
             <a:endParaRPr lang="en-US" dirty="0"/>
           </a:p>
         </p:txBody>
@@ -1044,34 +851,9 @@
           <a:p>
             <a:r>
               <a:rPr lang="en-US" dirty="0"/>
-              <a:t>[20:00–26:00]
-[CLICK] The claim: devotion </a:t>
-            </a:r>
-            <a:r>
-              <a:rPr lang="en-US"/>
-              <a:t>is invisible --&gt; even </a:t>
-            </a:r>
-            <a:r>
-              <a:rPr lang="en-US" dirty="0"/>
-              <a:t>to its owner. Let that second phrase sit.
-[CLICK] </a:t>
-            </a:r>
-            <a:r>
-              <a:rPr lang="en-US"/>
-              <a:t>Three witnesses --&gt; preview </a:t>
-            </a:r>
-            <a:r>
-              <a:rPr lang="en-US" dirty="0"/>
-              <a:t>only, one breath each (Saul is Week 2–3, Malachi Week 9, the Lord-Lord builders Week 8). All were sincere.
-[CLICK] Sincerity passed its own inspection every time. 2 </a:t>
-            </a:r>
-            <a:r>
-              <a:rPr lang="en-US"/>
-              <a:t>Cor 13:5 --&gt; God </a:t>
-            </a:r>
-            <a:r>
-              <a:rPr lang="en-US" dirty="0"/>
-              <a:t>commands the audit.
+              <a:t>[CLICK] The claim: devotion is invisible --&gt; even to its owner. Let that second phrase sit.
+[CLICK] Three witnesses --&gt; preview only, one breath each (Saul is Week 2–3, Malachi Week 9, the Lord-Lord builders Week 8). All were sincere.
+[CLICK] Sincerity passed its own inspection every time. 2 Cor 13:5 --&gt; God commands the audit.
 [CLICK] The course question. Pause. Transition: “Hebrews answers with one word: trained.”</a:t>
             </a:r>
           </a:p>
@@ -1159,51 +941,10 @@
           <a:p>
             <a:r>
               <a:rPr lang="en-US" dirty="0"/>
-              <a:t>[26:00–32:00]
-[CLICK] v</a:t>
-            </a:r>
-            <a:r>
-              <a:rPr lang="en-US"/>
-              <a:t>.12 --&gt; “</a:t>
-            </a:r>
-            <a:r>
-              <a:rPr lang="en-US" dirty="0"/>
-              <a:t>by this time.” The writer does math on them: years in vs. what they can digest. Run his math </a:t>
-            </a:r>
-            <a:r>
-              <a:rPr lang="en-US"/>
-              <a:t>on yourself --&gt; say </a:t>
-            </a:r>
-            <a:r>
-              <a:rPr lang="en-US" dirty="0"/>
-              <a:t>it kindly; this is invitation, not shaming.
-[CLICK] v</a:t>
-            </a:r>
-            <a:r>
-              <a:rPr lang="en-US"/>
-              <a:t>.14 --&gt; the </a:t>
-            </a:r>
-            <a:r>
-              <a:rPr lang="en-US" dirty="0"/>
-              <a:t>controlling verse. Read twice, slower the second time.
-[CLICK] Trained </a:t>
-            </a:r>
-            <a:r>
-              <a:rPr lang="en-US"/>
-              <a:t>by practice --&gt; the </a:t>
-            </a:r>
-            <a:r>
-              <a:rPr lang="en-US" dirty="0"/>
-              <a:t>tradesman illustration (pick the trade your class knows: carpenter, nurse, mechanic).
-[CLICK] Discern GOOD </a:t>
-            </a:r>
-            <a:r>
-              <a:rPr lang="en-US"/>
-              <a:t>and evil --&gt; loop </a:t>
-            </a:r>
-            <a:r>
-              <a:rPr lang="en-US" dirty="0"/>
-              <a:t>back to slide 2: the Good is His character. Recognizing it is a skill. Transition: “Here is the road we’ll take to train it.”</a:t>
+              <a:t>[CLICK] v.12 --&gt; “by this time.” The writer does math on them: years in vs. what they can digest. Run his math on yourself --&gt; say it kindly; this is invitation, not shaming.
+[CLICK] v.14 --&gt; the controlling verse. Read twice, slower the second time.
+[CLICK] Trained by practice --&gt; the tradesman illustration (pick the trade your class knows: carpenter, nurse, mechanic).
+[CLICK] Discern GOOD and evil --&gt; loop back to slide 2: the Good is His character. Recognizing it is a skill. Transition: “Here is the road we’ll take to train it.”</a:t>
             </a:r>
           </a:p>
         </p:txBody>
@@ -1290,33 +1031,8 @@
           <a:p>
             <a:r>
               <a:rPr lang="en-US" dirty="0"/>
-              <a:t>[32:00–42:00]
-[CLICK×5] Walk the five </a:t>
-            </a:r>
-            <a:r>
-              <a:rPr lang="en-US"/>
-              <a:t>units briskly --&gt; one </a:t>
-            </a:r>
-            <a:r>
-              <a:rPr lang="en-US" dirty="0"/>
-              <a:t>sentence each. Foundations builds the vocabulary; Discernment gives the method; Testing shows the covenant pattern and ours; God’s House applies it to authority and order; Commission sends.
-[CLICK] The </a:t>
-            </a:r>
-            <a:r>
-              <a:rPr lang="en-US"/>
-              <a:t>grace line --&gt; do </a:t>
-            </a:r>
-            <a:r>
-              <a:rPr lang="en-US" dirty="0"/>
-              <a:t>NOT rush this. Romans 12:1 begins “by the mercies of God.” Say plainly: this is a course about obedience that cannot be heard as earning. Mercy first, </a:t>
-            </a:r>
-            <a:r>
-              <a:rPr lang="en-US"/>
-              <a:t>altar second --&gt; we </a:t>
-            </a:r>
-            <a:r>
-              <a:rPr lang="en-US" dirty="0"/>
-              <a:t>will repeat it at weeks 4, 7, 9, and 12 on purpose.</a:t>
+              <a:t>[CLICK×5] Walk the five units briskly --&gt; one sentence each. Foundations builds the vocabulary; Discernment gives the method; Testing shows the covenant pattern and ours; God’s House applies it to authority and order; Commission sends.
+[CLICK] The grace line --&gt; do NOT rush this. Romans 12:1 begins “by the mercies of God.” Say plainly: this is a course about obedience that cannot be heard as earning. Mercy first, altar second --&gt; we will repeat it at weeks 4, 7, 9, and 12 on purpose.</a:t>
             </a:r>
           </a:p>
         </p:txBody>
@@ -1403,35 +1119,10 @@
           <a:p>
             <a:r>
               <a:rPr lang="en-US" dirty="0"/>
-              <a:t>[55:00 close, ~2 min]
-[CLICK] </a:t>
-            </a:r>
-            <a:r>
-              <a:rPr lang="en-US"/>
-              <a:t>Acts 17:11 --&gt; name </a:t>
-            </a:r>
-            <a:r>
-              <a:rPr lang="en-US" dirty="0"/>
-              <a:t>both halves; this is the course’s weekly discipline, kept light: one passage, read daily if possible.
-[CLICK] Next week’s reading with the two </a:t>
-            </a:r>
-            <a:r>
-              <a:rPr lang="en-US"/>
-              <a:t>guiding questions --&gt; they </a:t>
-            </a:r>
-            <a:r>
-              <a:rPr lang="en-US" dirty="0"/>
-              <a:t>make the reading Berean rather than passive.
+              <a:t>[CLICK] Acts 17:11 --&gt; name both halves; this is the course’s weekly discipline, kept light: one passage, read daily if possible.
+[CLICK] Next week’s reading with the two guiding questions --&gt; they make the reading Berean rather than passive.
 [CLICK] Preview Week 2 in one sentence.
-[CLICK] Close on </a:t>
-            </a:r>
-            <a:r>
-              <a:rPr lang="en-US"/>
-              <a:t>Psalm 34:8 --&gt; the </a:t>
-            </a:r>
-            <a:r>
-              <a:rPr lang="en-US" dirty="0"/>
-              <a:t>invitation, not an assignment. Dismiss on time.</a:t>
+[CLICK] Close on Psalm 34:8 --&gt; the invitation, not an assignment. Dismiss on time.</a:t>
             </a:r>
           </a:p>
         </p:txBody>
@@ -2026,7 +1717,36 @@
                   </a:extLst>
                 </a:hlinkClick>
               </a:rPr>
-              <a:t>https://tinyurl.com/TeachTheWord</a:t>
+              <a:t>http://</a:t>
+            </a:r>
+            <a:r>
+              <a:rPr lang="en-US" sz="2000" b="1" u="sng" dirty="0" err="1">
+                <a:solidFill>
+                  <a:srgbClr val="4F81BD"/>
+                </a:solidFill>
+                <a:latin typeface="Arial" pitchFamily="34" charset="0"/>
+                <a:ea typeface="Arial" pitchFamily="34" charset="-122"/>
+                <a:cs typeface="Arial" pitchFamily="34" charset="-120"/>
+                <a:hlinkClick r:id="rId3">
+                  <a:extLst>
+                    <a:ext uri="{A12FA001-AC4F-418D-AE19-62706E023703}">
+                      <ahyp:hlinkClr xmlns:ahyp="http://schemas.microsoft.com/office/drawing/2018/hyperlinkcolor" val="tx"/>
+                    </a:ext>
+                  </a:extLst>
+                </a:hlinkClick>
+              </a:rPr>
+              <a:t>TeachTheWord</a:t>
+            </a:r>
+            <a:r>
+              <a:rPr lang="en-US" sz="2000" b="1" u="sng" dirty="0" err="1">
+                <a:solidFill>
+                  <a:srgbClr val="4F81BD"/>
+                </a:solidFill>
+                <a:latin typeface="Arial" pitchFamily="34" charset="0"/>
+                <a:ea typeface="Arial" pitchFamily="34" charset="-122"/>
+                <a:cs typeface="Arial" pitchFamily="34" charset="-120"/>
+              </a:rPr>
+              <a:t>.Church</a:t>
             </a:r>
             <a:endParaRPr lang="en-US" sz="2000" dirty="0"/>
           </a:p>
@@ -2037,517 +1757,6 @@
   <p:clrMapOvr>
     <a:masterClrMapping/>
   </p:clrMapOvr>
-</p:sld>
-</file>
-
-<file path=ppt/slides/slide10.xml><?xml version="1.0" encoding="utf-8"?>
-<p:sld xmlns:a="http://schemas.openxmlformats.org/drawingml/2006/main" xmlns:r="http://schemas.openxmlformats.org/officeDocument/2006/relationships" xmlns:p="http://schemas.openxmlformats.org/presentationml/2006/main">
-  <p:cSld name="Slide 7">
-    <p:spTree>
-      <p:nvGrpSpPr>
-        <p:cNvPr id="1" name=""/>
-        <p:cNvGrpSpPr/>
-        <p:nvPr/>
-      </p:nvGrpSpPr>
-      <p:grpSpPr>
-        <a:xfrm>
-          <a:off x="0" y="0"/>
-          <a:ext cx="0" cy="0"/>
-          <a:chOff x="0" y="0"/>
-          <a:chExt cx="0" cy="0"/>
-        </a:xfrm>
-      </p:grpSpPr>
-      <p:sp>
-        <p:nvSpPr>
-          <p:cNvPr id="2" name="HeadTitle"/>
-          <p:cNvSpPr txBox="1"/>
-          <p:nvPr/>
-        </p:nvSpPr>
-        <p:spPr>
-          <a:xfrm>
-            <a:off x="228600" y="109728"/>
-            <a:ext cx="8686800" cy="502920"/>
-          </a:xfrm>
-          <a:prstGeom prst="rect">
-            <a:avLst/>
-          </a:prstGeom>
-          <a:noFill/>
-          <a:ln/>
-        </p:spPr>
-        <p:txBody>
-          <a:bodyPr wrap="square" lIns="0" tIns="0" rIns="0" bIns="0" rtlCol="0" anchor="t"/>
-          <a:lstStyle/>
-          <a:p>
-            <a:pPr marL="0" indent="0" algn="l">
-              <a:buNone/>
-            </a:pPr>
-            <a:r>
-              <a:rPr lang="en-US" sz="2600" b="1" dirty="0">
-                <a:solidFill>
-                  <a:srgbClr val="1F497D"/>
-                </a:solidFill>
-                <a:latin typeface="Arial" pitchFamily="34" charset="0"/>
-                <a:ea typeface="Arial" pitchFamily="34" charset="-122"/>
-                <a:cs typeface="Arial" pitchFamily="34" charset="-120"/>
-              </a:rPr>
-              <a:t>Discussion</a:t>
-            </a:r>
-            <a:endParaRPr lang="en-US" sz="1600" dirty="0"/>
-          </a:p>
-        </p:txBody>
-      </p:sp>
-      <p:sp>
-        <p:nvSpPr>
-          <p:cNvPr id="3" name="HeadSub"/>
-          <p:cNvSpPr txBox="1"/>
-          <p:nvPr/>
-        </p:nvSpPr>
-        <p:spPr>
-          <a:xfrm>
-            <a:off x="228600" y="566928"/>
-            <a:ext cx="8686800" cy="320040"/>
-          </a:xfrm>
-          <a:prstGeom prst="rect">
-            <a:avLst/>
-          </a:prstGeom>
-          <a:noFill/>
-          <a:ln/>
-        </p:spPr>
-        <p:txBody>
-          <a:bodyPr wrap="square" lIns="0" tIns="0" rIns="0" bIns="0" rtlCol="0" anchor="t"/>
-          <a:lstStyle/>
-          <a:p>
-            <a:pPr marL="0" indent="0" algn="l">
-              <a:buNone/>
-            </a:pPr>
-            <a:r>
-              <a:rPr lang="en-US" sz="1300" b="1" dirty="0">
-                <a:solidFill>
-                  <a:srgbClr val="4F81BD"/>
-                </a:solidFill>
-                <a:latin typeface="Arial" pitchFamily="34" charset="0"/>
-                <a:ea typeface="Arial" pitchFamily="34" charset="-122"/>
-                <a:cs typeface="Arial" pitchFamily="34" charset="-120"/>
-              </a:rPr>
-              <a:t>Ten minutes --&gt; this is the week’s practice</a:t>
-            </a:r>
-            <a:endParaRPr lang="en-US" sz="1600" dirty="0"/>
-          </a:p>
-        </p:txBody>
-      </p:sp>
-      <p:sp>
-        <p:nvSpPr>
-          <p:cNvPr id="4" name="x1"/>
-          <p:cNvSpPr txBox="1"/>
-          <p:nvPr/>
-        </p:nvSpPr>
-        <p:spPr>
-          <a:xfrm>
-            <a:off x="457200" y="1371600"/>
-            <a:ext cx="8229600" cy="1371600"/>
-          </a:xfrm>
-          <a:prstGeom prst="rect">
-            <a:avLst/>
-          </a:prstGeom>
-          <a:noFill/>
-          <a:ln/>
-        </p:spPr>
-        <p:txBody>
-          <a:bodyPr wrap="square" lIns="0" tIns="0" rIns="0" bIns="0" rtlCol="0" anchor="t"/>
-          <a:lstStyle/>
-          <a:p>
-            <a:pPr marL="0" indent="0" algn="l">
-              <a:buNone/>
-            </a:pPr>
-            <a:r>
-              <a:rPr lang="en-US" sz="2000" b="1" dirty="0">
-                <a:solidFill>
-                  <a:srgbClr val="1F497D"/>
-                </a:solidFill>
-                <a:latin typeface="Arial" pitchFamily="34" charset="0"/>
-                <a:ea typeface="Arial" pitchFamily="34" charset="-122"/>
-                <a:cs typeface="Arial" pitchFamily="34" charset="-120"/>
-              </a:rPr>
-              <a:t>1.  </a:t>
-            </a:r>
-            <a:r>
-              <a:rPr lang="en-US" sz="1800" dirty="0">
-                <a:solidFill>
-                  <a:srgbClr val="000000"/>
-                </a:solidFill>
-                <a:latin typeface="Arial" pitchFamily="34" charset="0"/>
-                <a:ea typeface="Arial" pitchFamily="34" charset="-122"/>
-                <a:cs typeface="Arial" pitchFamily="34" charset="-120"/>
-              </a:rPr>
-              <a:t>When you say something is “good” --&gt; a meal, a decision, a person --&gt; what standard are you actually using?</a:t>
-            </a:r>
-            <a:endParaRPr lang="en-US" sz="1600" dirty="0"/>
-          </a:p>
-        </p:txBody>
-      </p:sp>
-      <p:sp>
-        <p:nvSpPr>
-          <p:cNvPr id="5" name="x2"/>
-          <p:cNvSpPr txBox="1"/>
-          <p:nvPr/>
-        </p:nvSpPr>
-        <p:spPr>
-          <a:xfrm>
-            <a:off x="457200" y="3017520"/>
-            <a:ext cx="8229600" cy="1371600"/>
-          </a:xfrm>
-          <a:prstGeom prst="rect">
-            <a:avLst/>
-          </a:prstGeom>
-          <a:noFill/>
-          <a:ln/>
-        </p:spPr>
-        <p:txBody>
-          <a:bodyPr wrap="square" lIns="0" tIns="0" rIns="0" bIns="0" rtlCol="0" anchor="t"/>
-          <a:lstStyle/>
-          <a:p>
-            <a:pPr marL="0" indent="0" algn="l">
-              <a:buNone/>
-            </a:pPr>
-            <a:r>
-              <a:rPr lang="en-US" sz="2000" b="1" dirty="0">
-                <a:solidFill>
-                  <a:srgbClr val="1F497D"/>
-                </a:solidFill>
-                <a:latin typeface="Arial" pitchFamily="34" charset="0"/>
-                <a:ea typeface="Arial" pitchFamily="34" charset="-122"/>
-                <a:cs typeface="Arial" pitchFamily="34" charset="-120"/>
-              </a:rPr>
-              <a:t>2.  </a:t>
-            </a:r>
-            <a:r>
-              <a:rPr lang="en-US" sz="1800" dirty="0">
-                <a:solidFill>
-                  <a:srgbClr val="000000"/>
-                </a:solidFill>
-                <a:latin typeface="Arial" pitchFamily="34" charset="0"/>
-                <a:ea typeface="Arial" pitchFamily="34" charset="-122"/>
-                <a:cs typeface="Arial" pitchFamily="34" charset="-120"/>
-              </a:rPr>
-              <a:t>What would change --&gt; practically, this week --&gt; if goodness were a Person’s character rather than a measurement?</a:t>
-            </a:r>
-            <a:endParaRPr lang="en-US" sz="1600" dirty="0"/>
-          </a:p>
-        </p:txBody>
-      </p:sp>
-      <p:sp>
-        <p:nvSpPr>
-          <p:cNvPr id="6" name="x3"/>
-          <p:cNvSpPr txBox="1"/>
-          <p:nvPr/>
-        </p:nvSpPr>
-        <p:spPr>
-          <a:xfrm>
-            <a:off x="457200" y="4754880"/>
-            <a:ext cx="8229600" cy="1097280"/>
-          </a:xfrm>
-          <a:prstGeom prst="rect">
-            <a:avLst/>
-          </a:prstGeom>
-          <a:noFill/>
-          <a:ln/>
-        </p:spPr>
-        <p:txBody>
-          <a:bodyPr wrap="square" lIns="0" tIns="0" rIns="0" bIns="0" rtlCol="0" anchor="t"/>
-          <a:lstStyle/>
-          <a:p>
-            <a:pPr marL="0" indent="0" algn="l">
-              <a:buNone/>
-            </a:pPr>
-            <a:r>
-              <a:rPr lang="en-US" sz="1400" b="1" dirty="0">
-                <a:solidFill>
-                  <a:srgbClr val="000000"/>
-                </a:solidFill>
-                <a:latin typeface="Arial" pitchFamily="34" charset="0"/>
-                <a:ea typeface="Arial" pitchFamily="34" charset="-122"/>
-                <a:cs typeface="Arial" pitchFamily="34" charset="-120"/>
-              </a:rPr>
-              <a:t>Ground rule for the course: </a:t>
-            </a:r>
-            <a:r>
-              <a:rPr lang="en-US" sz="1400" i="1" dirty="0">
-                <a:solidFill>
-                  <a:srgbClr val="000000"/>
-                </a:solidFill>
-                <a:latin typeface="Arial" pitchFamily="34" charset="0"/>
-                <a:ea typeface="Arial" pitchFamily="34" charset="-122"/>
-                <a:cs typeface="Arial" pitchFamily="34" charset="-120"/>
-              </a:rPr>
-              <a:t>disagreement is welcome; every claim goes back to the text. We answer like Bereans --&gt; eager, and examining.</a:t>
-            </a:r>
-            <a:endParaRPr lang="en-US" sz="1600" dirty="0"/>
-          </a:p>
-        </p:txBody>
-      </p:sp>
-    </p:spTree>
-  </p:cSld>
-  <p:clrMapOvr>
-    <a:masterClrMapping/>
-  </p:clrMapOvr>
-  <p:timing>
-    <p:tnLst>
-      <p:par>
-        <p:cTn id="1" dur="indefinite" restart="never" nodeType="tmRoot">
-          <p:childTnLst>
-            <p:seq concurrent="1" nextAc="seek">
-              <p:cTn id="2" dur="indefinite" nodeType="mainSeq">
-                <p:childTnLst>
-                  <p:par>
-                    <p:cTn id="3" fill="hold">
-                      <p:stCondLst>
-                        <p:cond delay="indefinite"/>
-                      </p:stCondLst>
-                      <p:childTnLst>
-                        <p:par>
-                          <p:cTn id="4" fill="hold">
-                            <p:stCondLst>
-                              <p:cond delay="0"/>
-                            </p:stCondLst>
-                            <p:childTnLst>
-                              <p:par>
-                                <p:cTn id="5" presetID="42" presetClass="entr" presetSubtype="0" fill="hold" nodeType="clickEffect">
-                                  <p:stCondLst>
-                                    <p:cond delay="0"/>
-                                  </p:stCondLst>
-                                  <p:childTnLst>
-                                    <p:set>
-                                      <p:cBhvr>
-                                        <p:cTn id="6" dur="1" fill="hold">
-                                          <p:stCondLst>
-                                            <p:cond delay="0"/>
-                                          </p:stCondLst>
-                                        </p:cTn>
-                                        <p:tgtEl>
-                                          <p:spTgt spid="4"/>
-                                        </p:tgtEl>
-                                        <p:attrNameLst>
-                                          <p:attrName>style.visibility</p:attrName>
-                                        </p:attrNameLst>
-                                      </p:cBhvr>
-                                      <p:to>
-                                        <p:strVal val="visible"/>
-                                      </p:to>
-                                    </p:set>
-                                    <p:animEffect transition="in" filter="fade">
-                                      <p:cBhvr>
-                                        <p:cTn id="7" dur="1000"/>
-                                        <p:tgtEl>
-                                          <p:spTgt spid="4"/>
-                                        </p:tgtEl>
-                                      </p:cBhvr>
-                                    </p:animEffect>
-                                    <p:anim calcmode="lin" valueType="num">
-                                      <p:cBhvr>
-                                        <p:cTn id="8" dur="1000" fill="hold"/>
-                                        <p:tgtEl>
-                                          <p:spTgt spid="4"/>
-                                        </p:tgtEl>
-                                        <p:attrNameLst>
-                                          <p:attrName>ppt_y</p:attrName>
-                                        </p:attrNameLst>
-                                      </p:cBhvr>
-                                      <p:tavLst>
-                                        <p:tav tm="0">
-                                          <p:val>
-                                            <p:strVal val="#ppt_y+.1"/>
-                                          </p:val>
-                                        </p:tav>
-                                        <p:tav tm="100000">
-                                          <p:val>
-                                            <p:strVal val="#ppt_y"/>
-                                          </p:val>
-                                        </p:tav>
-                                      </p:tavLst>
-                                    </p:anim>
-                                  </p:childTnLst>
-                                </p:cTn>
-                              </p:par>
-                            </p:childTnLst>
-                          </p:cTn>
-                        </p:par>
-                      </p:childTnLst>
-                    </p:cTn>
-                  </p:par>
-                  <p:par>
-                    <p:cTn id="9" fill="hold">
-                      <p:stCondLst>
-                        <p:cond delay="indefinite"/>
-                      </p:stCondLst>
-                      <p:childTnLst>
-                        <p:par>
-                          <p:cTn id="10" fill="hold">
-                            <p:stCondLst>
-                              <p:cond delay="0"/>
-                            </p:stCondLst>
-                            <p:childTnLst>
-                              <p:par>
-                                <p:cTn id="11" presetID="42" presetClass="entr" presetSubtype="0" fill="hold" nodeType="clickEffect">
-                                  <p:stCondLst>
-                                    <p:cond delay="0"/>
-                                  </p:stCondLst>
-                                  <p:childTnLst>
-                                    <p:set>
-                                      <p:cBhvr>
-                                        <p:cTn id="12" dur="1" fill="hold">
-                                          <p:stCondLst>
-                                            <p:cond delay="0"/>
-                                          </p:stCondLst>
-                                        </p:cTn>
-                                        <p:tgtEl>
-                                          <p:spTgt spid="5"/>
-                                        </p:tgtEl>
-                                        <p:attrNameLst>
-                                          <p:attrName>style.visibility</p:attrName>
-                                        </p:attrNameLst>
-                                      </p:cBhvr>
-                                      <p:to>
-                                        <p:strVal val="visible"/>
-                                      </p:to>
-                                    </p:set>
-                                    <p:animEffect transition="in" filter="fade">
-                                      <p:cBhvr>
-                                        <p:cTn id="13" dur="1000"/>
-                                        <p:tgtEl>
-                                          <p:spTgt spid="5"/>
-                                        </p:tgtEl>
-                                      </p:cBhvr>
-                                    </p:animEffect>
-                                    <p:anim calcmode="lin" valueType="num">
-                                      <p:cBhvr>
-                                        <p:cTn id="14" dur="1000" fill="hold"/>
-                                        <p:tgtEl>
-                                          <p:spTgt spid="5"/>
-                                        </p:tgtEl>
-                                        <p:attrNameLst>
-                                          <p:attrName>ppt_y</p:attrName>
-                                        </p:attrNameLst>
-                                      </p:cBhvr>
-                                      <p:tavLst>
-                                        <p:tav tm="0">
-                                          <p:val>
-                                            <p:strVal val="#ppt_y+.1"/>
-                                          </p:val>
-                                        </p:tav>
-                                        <p:tav tm="100000">
-                                          <p:val>
-                                            <p:strVal val="#ppt_y"/>
-                                          </p:val>
-                                        </p:tav>
-                                      </p:tavLst>
-                                    </p:anim>
-                                  </p:childTnLst>
-                                </p:cTn>
-                              </p:par>
-                            </p:childTnLst>
-                          </p:cTn>
-                        </p:par>
-                      </p:childTnLst>
-                    </p:cTn>
-                  </p:par>
-                  <p:par>
-                    <p:cTn id="15" fill="hold">
-                      <p:stCondLst>
-                        <p:cond delay="indefinite"/>
-                      </p:stCondLst>
-                      <p:childTnLst>
-                        <p:par>
-                          <p:cTn id="16" fill="hold">
-                            <p:stCondLst>
-                              <p:cond delay="0"/>
-                            </p:stCondLst>
-                            <p:childTnLst>
-                              <p:par>
-                                <p:cTn id="17" presetID="42" presetClass="entr" presetSubtype="0" fill="hold" nodeType="clickEffect">
-                                  <p:stCondLst>
-                                    <p:cond delay="0"/>
-                                  </p:stCondLst>
-                                  <p:childTnLst>
-                                    <p:set>
-                                      <p:cBhvr>
-                                        <p:cTn id="18" dur="1" fill="hold">
-                                          <p:stCondLst>
-                                            <p:cond delay="0"/>
-                                          </p:stCondLst>
-                                        </p:cTn>
-                                        <p:tgtEl>
-                                          <p:spTgt spid="6"/>
-                                        </p:tgtEl>
-                                        <p:attrNameLst>
-                                          <p:attrName>style.visibility</p:attrName>
-                                        </p:attrNameLst>
-                                      </p:cBhvr>
-                                      <p:to>
-                                        <p:strVal val="visible"/>
-                                      </p:to>
-                                    </p:set>
-                                    <p:animEffect transition="in" filter="fade">
-                                      <p:cBhvr>
-                                        <p:cTn id="19" dur="1000"/>
-                                        <p:tgtEl>
-                                          <p:spTgt spid="6"/>
-                                        </p:tgtEl>
-                                      </p:cBhvr>
-                                    </p:animEffect>
-                                    <p:anim calcmode="lin" valueType="num">
-                                      <p:cBhvr>
-                                        <p:cTn id="20" dur="1000" fill="hold"/>
-                                        <p:tgtEl>
-                                          <p:spTgt spid="6"/>
-                                        </p:tgtEl>
-                                        <p:attrNameLst>
-                                          <p:attrName>ppt_y</p:attrName>
-                                        </p:attrNameLst>
-                                      </p:cBhvr>
-                                      <p:tavLst>
-                                        <p:tav tm="0">
-                                          <p:val>
-                                            <p:strVal val="#ppt_y+.1"/>
-                                          </p:val>
-                                        </p:tav>
-                                        <p:tav tm="100000">
-                                          <p:val>
-                                            <p:strVal val="#ppt_y"/>
-                                          </p:val>
-                                        </p:tav>
-                                      </p:tavLst>
-                                    </p:anim>
-                                  </p:childTnLst>
-                                </p:cTn>
-                              </p:par>
-                            </p:childTnLst>
-                          </p:cTn>
-                        </p:par>
-                      </p:childTnLst>
-                    </p:cTn>
-                  </p:par>
-                </p:childTnLst>
-              </p:cTn>
-              <p:prevCondLst>
-                <p:cond evt="onPrev" delay="0">
-                  <p:tgtEl>
-                    <p:sldTgt/>
-                  </p:tgtEl>
-                </p:cond>
-              </p:prevCondLst>
-              <p:nextCondLst>
-                <p:cond evt="onNext" delay="0">
-                  <p:tgtEl>
-                    <p:sldTgt/>
-                  </p:tgtEl>
-                </p:cond>
-              </p:nextCondLst>
-            </p:seq>
-          </p:childTnLst>
-        </p:cTn>
-      </p:par>
-    </p:tnLst>
-  </p:timing>
 </p:sld>
 </file>
 
@@ -10153,8 +9362,8 @@
         </p:nvSpPr>
         <p:spPr>
           <a:xfrm>
-            <a:off x="365760" y="5193792"/>
-            <a:ext cx="8412480" cy="1490472"/>
+            <a:off x="365760" y="5093208"/>
+            <a:ext cx="8412480" cy="1655063"/>
           </a:xfrm>
           <a:prstGeom prst="rect">
             <a:avLst/>
@@ -10178,7 +9387,23 @@
                 <a:ea typeface="Arial" pitchFamily="34" charset="-122"/>
                 <a:cs typeface="Arial" pitchFamily="34" charset="-120"/>
               </a:rPr>
-              <a:t>Stated before anything is asked of you:
+              <a:t>Stated before anything is asked of you:</a:t>
+            </a:r>
+          </a:p>
+          <a:p>
+            <a:pPr marL="0" indent="0" algn="l">
+              <a:buNone/>
+            </a:pPr>
+            <a:r>
+              <a:rPr lang="en-US" sz="1500" b="1" dirty="0">
+                <a:solidFill>
+                  <a:srgbClr val="000000"/>
+                </a:solidFill>
+                <a:latin typeface="Arial" pitchFamily="34" charset="0"/>
+                <a:ea typeface="Arial" pitchFamily="34" charset="-122"/>
+                <a:cs typeface="Arial" pitchFamily="34" charset="-120"/>
+              </a:rPr>
+              <a:t>
 </a:t>
             </a:r>
             <a:r>
@@ -10254,7 +9479,7 @@
                 <a:ea typeface="Arial" pitchFamily="34" charset="-122"/>
                 <a:cs typeface="Arial" pitchFamily="34" charset="-120"/>
               </a:rPr>
-              <a:t>Mercy first.  Altar second.  </a:t>
+              <a:t>Mercy first.  Altar second.  Your ”Living Sacrifice”.  </a:t>
             </a:r>
             <a:endParaRPr lang="en-US" sz="1600" dirty="0"/>
           </a:p>
@@ -10271,7 +9496,7 @@
                 <a:ea typeface="Arial" pitchFamily="34" charset="-122"/>
                 <a:cs typeface="Arial" pitchFamily="34" charset="-120"/>
               </a:rPr>
-              <a:t>Nothing in this course earns standing; all of it responds to a sacrifice already completed.</a:t>
+              <a:t>Nothing in this course earns your standing before God; all of it responds to a sacrifice already completed.</a:t>
             </a:r>
             <a:endParaRPr lang="en-US" sz="1600" dirty="0"/>
           </a:p>
@@ -11401,7 +10626,7 @@
                 <a:ea typeface="Arial" pitchFamily="34" charset="-122"/>
                 <a:cs typeface="Arial" pitchFamily="34" charset="-120"/>
               </a:rPr>
-              <a:t>The Rhythm: Read Like a Berean</a:t>
+              <a:t>The Course Rhythm: Read Like a Berean</a:t>
             </a:r>
             <a:endParaRPr lang="en-US" sz="1600" dirty="0"/>
           </a:p>
@@ -11440,7 +10665,7 @@
                 <a:ea typeface="Arial" pitchFamily="34" charset="-122"/>
                 <a:cs typeface="Arial" pitchFamily="34" charset="-120"/>
               </a:rPr>
-              <a:t>One passage a week </a:t>
+              <a:t>Scripture each week </a:t>
             </a:r>
             <a:r>
               <a:rPr lang="en-US" sz="2000" b="1" dirty="0">
@@ -11477,7 +10702,7 @@
         </p:nvSpPr>
         <p:spPr>
           <a:xfrm>
-            <a:off x="365760" y="1188720"/>
+            <a:off x="365760" y="1069848"/>
             <a:ext cx="8412480" cy="975058"/>
           </a:xfrm>
           <a:prstGeom prst="rect">
@@ -11653,8 +10878,8 @@
         </p:nvSpPr>
         <p:spPr>
           <a:xfrm>
-            <a:off x="365760" y="2363261"/>
-            <a:ext cx="8412480" cy="1371600"/>
+            <a:off x="365760" y="2058837"/>
+            <a:ext cx="8412480" cy="2190508"/>
           </a:xfrm>
           <a:prstGeom prst="rect">
             <a:avLst/>
@@ -11682,62 +10907,141 @@
 </a:t>
             </a:r>
             <a:r>
-              <a:rPr lang="en-US" dirty="0">
-                <a:solidFill>
-                  <a:srgbClr val="000000"/>
-                </a:solidFill>
-                <a:latin typeface="Arial" pitchFamily="34" charset="0"/>
-                <a:ea typeface="Arial" pitchFamily="34" charset="-122"/>
-                <a:cs typeface="Arial" pitchFamily="34" charset="-120"/>
-              </a:rPr>
-              <a:t>•  Genesis 22:1–19  </a:t>
-            </a:r>
-            <a:r>
-              <a:rPr lang="en-US" dirty="0">
-                <a:solidFill>
-                  <a:srgbClr val="000000"/>
-                </a:solidFill>
-                <a:latin typeface="Arial" pitchFamily="34" charset="0"/>
-                <a:ea typeface="Arial" pitchFamily="34" charset="-122"/>
+              <a:rPr lang="en-US" sz="2000" dirty="0">
+                <a:solidFill>
+                  <a:srgbClr val="000000"/>
+                </a:solidFill>
+                <a:latin typeface="Arial" pitchFamily="34" charset="0"/>
+                <a:cs typeface="Arial" pitchFamily="34" charset="-120"/>
+              </a:rPr>
+              <a:t>•  </a:t>
+            </a:r>
+            <a:r>
+              <a:rPr lang="en-US" sz="2000" b="1" dirty="0">
+                <a:solidFill>
+                  <a:srgbClr val="000000"/>
+                </a:solidFill>
+                <a:latin typeface="Arial" pitchFamily="34" charset="0"/>
+                <a:cs typeface="Arial" pitchFamily="34" charset="-120"/>
+              </a:rPr>
+              <a:t>Genesis 22:1–19</a:t>
+            </a:r>
+            <a:r>
+              <a:rPr lang="en-US" sz="2000" dirty="0">
+                <a:solidFill>
+                  <a:srgbClr val="000000"/>
+                </a:solidFill>
+                <a:latin typeface="Arial" pitchFamily="34" charset="0"/>
+                <a:cs typeface="Arial" pitchFamily="34" charset="-120"/>
+              </a:rPr>
+              <a:t>  </a:t>
+            </a:r>
+            <a:r>
+              <a:rPr lang="en-US" sz="2000" dirty="0">
+                <a:solidFill>
+                  <a:srgbClr val="000000"/>
+                </a:solidFill>
+                <a:latin typeface="Arial" pitchFamily="34" charset="0"/>
                 <a:cs typeface="Arial" pitchFamily="34" charset="-120"/>
                 <a:sym typeface="Wingdings" pitchFamily="2" charset="2"/>
               </a:rPr>
               <a:t></a:t>
             </a:r>
             <a:r>
-              <a:rPr lang="en-US" dirty="0">
-                <a:solidFill>
-                  <a:srgbClr val="000000"/>
-                </a:solidFill>
-                <a:latin typeface="Arial" pitchFamily="34" charset="0"/>
-                <a:ea typeface="Arial" pitchFamily="34" charset="-122"/>
-                <a:cs typeface="Arial" pitchFamily="34" charset="-120"/>
-              </a:rPr>
-              <a:t> what exactly does God ask for, and when does Abraham’s faith become visible?
-•  Hebrews 11:17–19  </a:t>
-            </a:r>
-            <a:r>
-              <a:rPr lang="en-US" dirty="0">
-                <a:solidFill>
-                  <a:srgbClr val="000000"/>
-                </a:solidFill>
-                <a:latin typeface="Arial" pitchFamily="34" charset="0"/>
-                <a:ea typeface="Arial" pitchFamily="34" charset="-122"/>
+              <a:rPr lang="en-US" sz="2000" dirty="0">
+                <a:solidFill>
+                  <a:srgbClr val="000000"/>
+                </a:solidFill>
+                <a:latin typeface="Arial" pitchFamily="34" charset="0"/>
+                <a:cs typeface="Arial" pitchFamily="34" charset="-120"/>
+              </a:rPr>
+              <a:t> What exactly does God ask for, and when does Abraham’s faith become visible?
+•  </a:t>
+            </a:r>
+            <a:r>
+              <a:rPr lang="en-US" sz="2000" b="1" dirty="0">
+                <a:solidFill>
+                  <a:srgbClr val="000000"/>
+                </a:solidFill>
+                <a:latin typeface="Arial" pitchFamily="34" charset="0"/>
+                <a:cs typeface="Arial" pitchFamily="34" charset="-120"/>
+              </a:rPr>
+              <a:t>Hebrews 11:17–19</a:t>
+            </a:r>
+            <a:r>
+              <a:rPr lang="en-US" sz="2000" dirty="0">
+                <a:solidFill>
+                  <a:srgbClr val="000000"/>
+                </a:solidFill>
+                <a:latin typeface="Arial" pitchFamily="34" charset="0"/>
+                <a:cs typeface="Arial" pitchFamily="34" charset="-120"/>
+              </a:rPr>
+              <a:t>  </a:t>
+            </a:r>
+            <a:r>
+              <a:rPr lang="en-US" sz="2000" dirty="0">
+                <a:solidFill>
+                  <a:srgbClr val="000000"/>
+                </a:solidFill>
+                <a:latin typeface="Arial" pitchFamily="34" charset="0"/>
                 <a:cs typeface="Arial" pitchFamily="34" charset="-120"/>
                 <a:sym typeface="Wingdings" pitchFamily="2" charset="2"/>
               </a:rPr>
               <a:t></a:t>
             </a:r>
             <a:r>
-              <a:rPr lang="en-US" dirty="0">
-                <a:solidFill>
-                  <a:srgbClr val="000000"/>
-                </a:solidFill>
-                <a:latin typeface="Arial" pitchFamily="34" charset="0"/>
-                <a:ea typeface="Arial" pitchFamily="34" charset="-122"/>
-                <a:cs typeface="Arial" pitchFamily="34" charset="-120"/>
-              </a:rPr>
-              <a:t> what did Abraham reason, and what did the test prove?</a:t>
+              <a:rPr lang="en-US" sz="2000" dirty="0">
+                <a:solidFill>
+                  <a:srgbClr val="000000"/>
+                </a:solidFill>
+                <a:latin typeface="Arial" pitchFamily="34" charset="0"/>
+                <a:cs typeface="Arial" pitchFamily="34" charset="-120"/>
+              </a:rPr>
+              <a:t> What did Abraham reason, and what did the test prove?</a:t>
+            </a:r>
+          </a:p>
+          <a:p>
+            <a:pPr marL="342900" indent="-342900" algn="l">
+              <a:buFont typeface="Arial" panose="020B0604020202020204" pitchFamily="34" charset="0"/>
+              <a:buChar char="•"/>
+            </a:pPr>
+            <a:r>
+              <a:rPr lang="en-US" sz="2000" dirty="0">
+                <a:solidFill>
+                  <a:srgbClr val="000000"/>
+                </a:solidFill>
+                <a:latin typeface="Arial" pitchFamily="34" charset="0"/>
+                <a:cs typeface="Arial" pitchFamily="34" charset="-120"/>
+              </a:rPr>
+              <a:t>Document </a:t>
+            </a:r>
+            <a:r>
+              <a:rPr lang="en-US" sz="2000" dirty="0">
+                <a:solidFill>
+                  <a:srgbClr val="000000"/>
+                </a:solidFill>
+                <a:latin typeface="Arial" pitchFamily="34" charset="0"/>
+                <a:cs typeface="Arial" pitchFamily="34" charset="-120"/>
+                <a:sym typeface="Wingdings" pitchFamily="2" charset="2"/>
+              </a:rPr>
+              <a:t> Faith Tests Across Covenants</a:t>
+            </a:r>
+          </a:p>
+          <a:p>
+            <a:pPr marL="342900" indent="-342900" algn="l">
+              <a:buFont typeface="Arial" panose="020B0604020202020204" pitchFamily="34" charset="0"/>
+              <a:buChar char="•"/>
+            </a:pPr>
+            <a:r>
+              <a:rPr lang="en-US" sz="2000" dirty="0">
+                <a:solidFill>
+                  <a:srgbClr val="000000"/>
+                </a:solidFill>
+                <a:latin typeface="Arial" pitchFamily="34" charset="0"/>
+                <a:cs typeface="Arial" pitchFamily="34" charset="-120"/>
+                <a:sym typeface="Wingdings" pitchFamily="2" charset="2"/>
+              </a:rPr>
+              <a:t>Document  God’s Will – Three Observed Types</a:t>
             </a:r>
             <a:endParaRPr lang="en-US" sz="2000" dirty="0"/>
           </a:p>
@@ -11883,15 +11187,19 @@
                 <a:latin typeface="Arial" pitchFamily="34" charset="0"/>
                 <a:ea typeface="Arial" pitchFamily="34" charset="-122"/>
                 <a:cs typeface="Arial" pitchFamily="34" charset="-120"/>
-                <a:hlinkClick r:id="rId3">
-                  <a:extLst>
-                    <a:ext uri="{A12FA001-AC4F-418D-AE19-62706E023703}">
-                      <ahyp:hlinkClr xmlns:ahyp="http://schemas.microsoft.com/office/drawing/2018/hyperlinkcolor" val="tx"/>
-                    </a:ext>
-                  </a:extLst>
-                </a:hlinkClick>
-              </a:rPr>
-              <a:t>https://tinyurl.com/TeachTheWord</a:t>
+              </a:rPr>
+              <a:t>http://</a:t>
+            </a:r>
+            <a:r>
+              <a:rPr lang="en-US" b="1" u="sng" dirty="0" err="1">
+                <a:solidFill>
+                  <a:srgbClr val="4F81BD"/>
+                </a:solidFill>
+                <a:latin typeface="Arial" pitchFamily="34" charset="0"/>
+                <a:ea typeface="Arial" pitchFamily="34" charset="-122"/>
+                <a:cs typeface="Arial" pitchFamily="34" charset="-120"/>
+              </a:rPr>
+              <a:t>TeachTheWord.Church</a:t>
             </a:r>
             <a:endParaRPr lang="en-US" sz="2400" dirty="0"/>
           </a:p>

--- a/2026-Q4/02-PurposeOfTheGood/Week02-PurposeOfTheGood.pptx
+++ b/2026-Q4/02-PurposeOfTheGood/Week02-PurposeOfTheGood.pptx
@@ -1911,7 +1911,29 @@
                 <a:ea typeface="Arial" pitchFamily="34" charset="-122"/>
                 <a:cs typeface="Arial" pitchFamily="34" charset="-120"/>
               </a:rPr>
-              <a:t>“Good teacher, what must I do to inherit eternal life?” </a:t>
+              <a:t>“</a:t>
+            </a:r>
+            <a:r>
+              <a:rPr lang="en-US" sz="2000" b="1" i="1" u="sng" dirty="0">
+                <a:solidFill>
+                  <a:srgbClr val="000000"/>
+                </a:solidFill>
+                <a:latin typeface="Arial" pitchFamily="34" charset="0"/>
+                <a:ea typeface="Arial" pitchFamily="34" charset="-122"/>
+                <a:cs typeface="Arial" pitchFamily="34" charset="-120"/>
+              </a:rPr>
+              <a:t>Good teacher</a:t>
+            </a:r>
+            <a:r>
+              <a:rPr lang="en-US" sz="2000" b="1" i="1" dirty="0">
+                <a:solidFill>
+                  <a:srgbClr val="000000"/>
+                </a:solidFill>
+                <a:latin typeface="Arial" pitchFamily="34" charset="0"/>
+                <a:ea typeface="Arial" pitchFamily="34" charset="-122"/>
+                <a:cs typeface="Arial" pitchFamily="34" charset="-120"/>
+              </a:rPr>
+              <a:t>, what must I do to inherit eternal life?” </a:t>
             </a:r>
             <a:r>
               <a:rPr lang="en-US" b="1" dirty="0">
@@ -1945,7 +1967,29 @@
                 <a:ea typeface="Arial" pitchFamily="34" charset="-122"/>
                 <a:cs typeface="Arial" pitchFamily="34" charset="-120"/>
               </a:rPr>
-              <a:t>“Why do you call me good? No one is good except God alone.” </a:t>
+              <a:t>“</a:t>
+            </a:r>
+            <a:r>
+              <a:rPr lang="en-US" sz="2000" b="1" i="1" u="sng" dirty="0">
+                <a:solidFill>
+                  <a:srgbClr val="000000"/>
+                </a:solidFill>
+                <a:latin typeface="Arial" pitchFamily="34" charset="0"/>
+                <a:ea typeface="Arial" pitchFamily="34" charset="-122"/>
+                <a:cs typeface="Arial" pitchFamily="34" charset="-120"/>
+              </a:rPr>
+              <a:t>Why do you call me good</a:t>
+            </a:r>
+            <a:r>
+              <a:rPr lang="en-US" sz="2000" b="1" i="1" dirty="0">
+                <a:solidFill>
+                  <a:srgbClr val="000000"/>
+                </a:solidFill>
+                <a:latin typeface="Arial" pitchFamily="34" charset="0"/>
+                <a:ea typeface="Arial" pitchFamily="34" charset="-122"/>
+                <a:cs typeface="Arial" pitchFamily="34" charset="-120"/>
+              </a:rPr>
+              <a:t>? No one is good except God alone.” </a:t>
             </a:r>
           </a:p>
           <a:p>
@@ -2153,7 +2197,51 @@
                 <a:ea typeface="Arial" pitchFamily="34" charset="-122"/>
                 <a:cs typeface="Arial" pitchFamily="34" charset="-120"/>
               </a:rPr>
-              <a:t>“I will make all my goodness pass before your face, and I will proclaim the LORD by name before you.” </a:t>
+              <a:t>“I will make all my </a:t>
+            </a:r>
+            <a:r>
+              <a:rPr lang="en-US" b="1" i="1" u="sng" dirty="0">
+                <a:solidFill>
+                  <a:srgbClr val="000000"/>
+                </a:solidFill>
+                <a:latin typeface="Arial" pitchFamily="34" charset="0"/>
+                <a:ea typeface="Arial" pitchFamily="34" charset="-122"/>
+                <a:cs typeface="Arial" pitchFamily="34" charset="-120"/>
+              </a:rPr>
+              <a:t>goodness</a:t>
+            </a:r>
+            <a:r>
+              <a:rPr lang="en-US" b="1" i="1" dirty="0">
+                <a:solidFill>
+                  <a:srgbClr val="000000"/>
+                </a:solidFill>
+                <a:latin typeface="Arial" pitchFamily="34" charset="0"/>
+                <a:ea typeface="Arial" pitchFamily="34" charset="-122"/>
+                <a:cs typeface="Arial" pitchFamily="34" charset="-120"/>
+              </a:rPr>
+              <a:t> pass before your face, and I will proclaim the LORD </a:t>
+            </a:r>
+            <a:r>
+              <a:rPr lang="en-US" b="1" i="1" u="sng" dirty="0">
+                <a:solidFill>
+                  <a:srgbClr val="000000"/>
+                </a:solidFill>
+                <a:latin typeface="Arial" pitchFamily="34" charset="0"/>
+                <a:ea typeface="Arial" pitchFamily="34" charset="-122"/>
+                <a:cs typeface="Arial" pitchFamily="34" charset="-120"/>
+              </a:rPr>
+              <a:t>by name</a:t>
+            </a:r>
+            <a:r>
+              <a:rPr lang="en-US" b="1" i="1" dirty="0">
+                <a:solidFill>
+                  <a:srgbClr val="000000"/>
+                </a:solidFill>
+                <a:latin typeface="Arial" pitchFamily="34" charset="0"/>
+                <a:ea typeface="Arial" pitchFamily="34" charset="-122"/>
+                <a:cs typeface="Arial" pitchFamily="34" charset="-120"/>
+              </a:rPr>
+              <a:t> before you.” </a:t>
             </a:r>
             <a:r>
               <a:rPr lang="en-US" b="1" dirty="0">
@@ -2192,7 +2280,29 @@
                 <a:ea typeface="Arial" pitchFamily="34" charset="-122"/>
                 <a:cs typeface="Arial" pitchFamily="34" charset="-120"/>
               </a:rPr>
-              <a:t>“Taste and see that the LORD is good!” </a:t>
+              <a:t>“Taste and see that </a:t>
+            </a:r>
+            <a:r>
+              <a:rPr lang="en-US" b="1" i="1" u="sng" dirty="0">
+                <a:solidFill>
+                  <a:srgbClr val="000000"/>
+                </a:solidFill>
+                <a:latin typeface="Arial" pitchFamily="34" charset="0"/>
+                <a:ea typeface="Arial" pitchFamily="34" charset="-122"/>
+                <a:cs typeface="Arial" pitchFamily="34" charset="-120"/>
+              </a:rPr>
+              <a:t>the LORD is good</a:t>
+            </a:r>
+            <a:r>
+              <a:rPr lang="en-US" b="1" i="1" dirty="0">
+                <a:solidFill>
+                  <a:srgbClr val="000000"/>
+                </a:solidFill>
+                <a:latin typeface="Arial" pitchFamily="34" charset="0"/>
+                <a:ea typeface="Arial" pitchFamily="34" charset="-122"/>
+                <a:cs typeface="Arial" pitchFamily="34" charset="-120"/>
+              </a:rPr>
+              <a:t>!” </a:t>
             </a:r>
             <a:r>
               <a:rPr lang="en-US" b="1" dirty="0">
@@ -3298,7 +3408,7 @@
                 <a:ea typeface="Arial" pitchFamily="34" charset="-122"/>
                 <a:cs typeface="Arial" pitchFamily="34" charset="-120"/>
               </a:rPr>
-              <a:t> falls short of what the Good is for.</a:t>
+              <a:t> falls short of what the Good has purposed.</a:t>
             </a:r>
             <a:endParaRPr lang="en-US" dirty="0"/>
           </a:p>
@@ -4121,7 +4231,47 @@
                 <a:latin typeface="Arial" pitchFamily="34" charset="0"/>
                 <a:cs typeface="Arial" pitchFamily="34" charset="-120"/>
               </a:rPr>
-              <a:t> Perfect Alignment with God’s Will and Purpose (The Good)</a:t>
+              <a:t> Perfect Alignment with God’s </a:t>
+            </a:r>
+            <a:r>
+              <a:rPr lang="en-US" sz="2000" b="1" u="sng" dirty="0">
+                <a:solidFill>
+                  <a:srgbClr val="4F81BD"/>
+                </a:solidFill>
+                <a:latin typeface="Arial" pitchFamily="34" charset="0"/>
+                <a:cs typeface="Arial" pitchFamily="34" charset="-120"/>
+              </a:rPr>
+              <a:t>Will</a:t>
+            </a:r>
+            <a:r>
+              <a:rPr lang="en-US" sz="2000" b="1" dirty="0">
+                <a:solidFill>
+                  <a:srgbClr val="4F81BD"/>
+                </a:solidFill>
+                <a:latin typeface="Arial" pitchFamily="34" charset="0"/>
+                <a:cs typeface="Arial" pitchFamily="34" charset="-120"/>
+              </a:rPr>
+              <a:t> and </a:t>
+            </a:r>
+            <a:r>
+              <a:rPr lang="en-US" sz="2000" b="1" u="sng" dirty="0">
+                <a:solidFill>
+                  <a:srgbClr val="4F81BD"/>
+                </a:solidFill>
+                <a:latin typeface="Arial" pitchFamily="34" charset="0"/>
+                <a:cs typeface="Arial" pitchFamily="34" charset="-120"/>
+              </a:rPr>
+              <a:t>Purpose</a:t>
+            </a:r>
+            <a:r>
+              <a:rPr lang="en-US" sz="2000" b="1" dirty="0">
+                <a:solidFill>
+                  <a:srgbClr val="4F81BD"/>
+                </a:solidFill>
+                <a:latin typeface="Arial" pitchFamily="34" charset="0"/>
+                <a:cs typeface="Arial" pitchFamily="34" charset="-120"/>
+              </a:rPr>
+              <a:t> (The Good)</a:t>
             </a:r>
             <a:endParaRPr lang="en-US" sz="2000" dirty="0"/>
           </a:p>
@@ -9348,7 +9498,30 @@
                 <a:ea typeface="Arial" pitchFamily="34" charset="-122"/>
                 <a:cs typeface="Arial" pitchFamily="34" charset="-120"/>
               </a:rPr>
-              <a:t>Households · “by this time --&gt; teachers”</a:t>
+              <a:t>Households · “by this time </a:t>
+            </a:r>
+            <a:r>
+              <a:rPr lang="en-US" dirty="0">
+                <a:solidFill>
+                  <a:srgbClr val="000000"/>
+                </a:solidFill>
+                <a:latin typeface="Arial" pitchFamily="34" charset="0"/>
+                <a:ea typeface="Arial" pitchFamily="34" charset="-122"/>
+                <a:cs typeface="Arial" pitchFamily="34" charset="-120"/>
+                <a:sym typeface="Wingdings" pitchFamily="2" charset="2"/>
+              </a:rPr>
+              <a:t></a:t>
+            </a:r>
+            <a:r>
+              <a:rPr lang="en-US" dirty="0">
+                <a:solidFill>
+                  <a:srgbClr val="000000"/>
+                </a:solidFill>
+                <a:latin typeface="Arial" pitchFamily="34" charset="0"/>
+                <a:ea typeface="Arial" pitchFamily="34" charset="-122"/>
+                <a:cs typeface="Arial" pitchFamily="34" charset="-120"/>
+              </a:rPr>
+              <a:t> teachers”</a:t>
             </a:r>
             <a:endParaRPr lang="en-US" sz="2000" dirty="0"/>
           </a:p>
